--- a/docs/gost/10-prezentaciya-dizajn.pptx
+++ b/docs/gost/10-prezentaciya-dizajn.pptx
@@ -210,7 +210,7 @@
           <a:p>
             <a:r>
               <a:rPr lang="ru-RU"/>
-              <a:t>Слабое место проекта. Правила точны, но на автоматическом графе им не хватает фактов: найдено 0 из 12 противоречий. Извлечение «кто где был» оставило 16 и 7 фактов на 159 фрагментах у двух моделей, и ни один не привязан ко дню рассказа. Эталон для проверки содержит всего четыре строгих факта, поэтому оценки неустойчивы. В демо красные конфликты держатся на фактах, введённых вручную и перепроверенных человеком.</a:t>
+              <a:t>Точки роста. Правила точны, а на автоматическом графе им пока не хватает фактов: найдено 0 из 12 противоречий. Извлечение «кто где был» оставило 16 и 7 фактов на 159 фрагментах у двух моделей, и ни один не привязан ко дню рассказа. Эталон для проверки содержит всего четыре строгих факта, поэтому оценки неустойчивы. В демо красные конфликты держатся на фактах, введённых вручную и перепроверенных человеком.</a:t>
             </a:r>
           </a:p>
         </p:txBody>
@@ -328,7 +328,7 @@
           <a:p>
             <a:r>
               <a:rPr lang="ru-RU"/>
-              <a:t>Мы пробовали заставить систему угадывать виновного до развязки. Результат: ненадёжно. На тесте ни один метод не обыграл простые. На dev лучший из примерно тридцати пяти вариантов угадал 4 из 8, но на шести новых рассказах тот же метод угадал 2 из 6, как простой «самый упоминаемый». Интервал 0,10–0,70, то есть различить методы нельзя. Невиновных система не обвиняет, но для этого ей приходится часто отказываться отвечать. Метки виновного и точек обрыва не проверены человеком.</a:t>
+              <a:t>Мы проверили, как система справляется с угадыванием виновного до развязки. Первый результат: на уровне простых методов, и мы понимаем, куда двигаться. На тесте ни один метод не обыграл простые. На dev лучший из примерно тридцати пяти вариантов угадал 4 из 8, но на шести новых рассказах тот же метод угадал 2 из 6, как простой «самый упоминаемый». Интервал 0,10–0,70, то есть различить методы нельзя. Осторожный режим ни разу не назвал невиновного, но отвечает редко; один оправданный назван первым при ответе без отказов. Метки виновного и точек обрыва не проверены человеком.</a:t>
             </a:r>
           </a:p>
         </p:txBody>
@@ -387,7 +387,7 @@
           <a:p>
             <a:r>
               <a:rPr lang="ru-RU"/>
-              <a:t>Четыре вывода. Сильная сторона: ответы с цитатами и отказ, когда ответа нет. Слабая: автоматический граф, где фактов для правил не хватает, и ненадёжное угадывание виновного. Дальше: человек проверяет эталонные наборы, система устанавливается и измеряется на двух ноутбуках.</a:t>
+              <a:t>Четыре вывода. Сильные стороны: ответы с цитатами, отказ, когда ответа нет, и лучший результат из трёх вариантов на тесте. Точки роста: больше фактов для правил на автоматическом графе и угадывание виновного, где мы пока на уровне простых методов. Дальше: человек проверяет эталонные наборы, система устанавливается и измеряется на двух ноутбуках.</a:t>
             </a:r>
           </a:p>
         </p:txBody>
@@ -1958,7 +1958,7 @@
                 <a:latin typeface="Georgia"/>
                 <a:cs typeface="Georgia"/>
               </a:rPr>
-              <a:t>Что пока не работает</a:t>
+              <a:t>Над чем работаем дальше</a:t>
             </a:r>
           </a:p>
         </p:txBody>
@@ -2003,7 +2003,7 @@
         <p:spPr>
           <a:xfrm>
             <a:off x="812800" y="1619250"/>
-            <a:ext cx="5181600" cy="1562100"/>
+            <a:ext cx="5181600" cy="1841500"/>
           </a:xfrm>
           <a:prstGeom prst="roundRect">
             <a:avLst>
@@ -2069,7 +2069,7 @@
                 <a:latin typeface="Arial"/>
                 <a:cs typeface="Arial"/>
               </a:rPr>
-              <a:t>противоречий нашли правила на автоматическом графе</a:t>
+              <a:t>противоречий на автоматическом графе: нужно больше фактов «кто где был»</a:t>
             </a:r>
           </a:p>
         </p:txBody>
@@ -2083,7 +2083,7 @@
         <p:spPr>
           <a:xfrm>
             <a:off x="6197600" y="1619250"/>
-            <a:ext cx="5181600" cy="1562100"/>
+            <a:ext cx="5181600" cy="1841500"/>
           </a:xfrm>
           <a:prstGeom prst="roundRect">
             <a:avLst>
@@ -2149,7 +2149,7 @@
                 <a:latin typeface="Arial"/>
                 <a:cs typeface="Arial"/>
               </a:rPr>
-              <a:t>фактов «кто где был» осталось на 159 фрагментах (две модели)</a:t>
+              <a:t>проверенных фактов «кто где был» на 159 фрагментах (две модели): основа, которую расширим</a:t>
             </a:r>
           </a:p>
         </p:txBody>
@@ -2162,8 +2162,8 @@
         </p:nvSpPr>
         <p:spPr>
           <a:xfrm>
-            <a:off x="812800" y="3384550"/>
-            <a:ext cx="5181600" cy="1562100"/>
+            <a:off x="812800" y="3663950"/>
+            <a:ext cx="5181600" cy="1841500"/>
           </a:xfrm>
           <a:prstGeom prst="roundRect">
             <a:avLst>
@@ -2229,7 +2229,7 @@
                 <a:latin typeface="Arial"/>
                 <a:cs typeface="Arial"/>
               </a:rPr>
-              <a:t>из них привязаны ко дню рассказа</a:t>
+              <a:t>из них пока привязаны ко дню рассказа: следующий шаг</a:t>
             </a:r>
           </a:p>
         </p:txBody>
@@ -2242,8 +2242,8 @@
         </p:nvSpPr>
         <p:spPr>
           <a:xfrm>
-            <a:off x="6197600" y="3384550"/>
-            <a:ext cx="5181600" cy="1562100"/>
+            <a:off x="6197600" y="3663950"/>
+            <a:ext cx="5181600" cy="1841500"/>
           </a:xfrm>
           <a:prstGeom prst="roundRect">
             <a:avLst>
@@ -2309,7 +2309,7 @@
                 <a:latin typeface="Arial"/>
                 <a:cs typeface="Arial"/>
               </a:rPr>
-              <a:t>строгих факта в эталоне для проверки</a:t>
+              <a:t>строгих факта в эталоне: расширим набор</a:t>
             </a:r>
           </a:p>
         </p:txBody>
@@ -3814,7 +3814,7 @@
                 <a:latin typeface="Georgia"/>
                 <a:cs typeface="Georgia"/>
               </a:rPr>
-              <a:t>Угадывание виновного: ненадёжно</a:t>
+              <a:t>Эксперимент: угадываем виновного</a:t>
             </a:r>
           </a:p>
         </p:txBody>
@@ -3939,7 +3939,7 @@
                 <a:latin typeface="Arial"/>
                 <a:cs typeface="Arial"/>
               </a:rPr>
-              <a:t>виновный назван первым на 6 новых рассказах; столько же у «самого упоминаемого»</a:t>
+              <a:t>виновный назван первым на 6 новых рассказах: на уровне простого метода «самый упоминаемый»</a:t>
             </a:r>
           </a:p>
         </p:txBody>
@@ -3986,7 +3986,7 @@
                 <a:latin typeface="Arial"/>
                 <a:cs typeface="Arial"/>
               </a:rPr>
-              <a:t>Тест (8 рассказов, один прогон): ни один метод не лучше простых.</a:t>
+              <a:t>Тест (8 рассказов, один прогон): наши методы на уровне простых.</a:t>
             </a:r>
           </a:p>
           <a:p>
@@ -4010,7 +4010,7 @@
                 <a:latin typeface="Arial"/>
                 <a:cs typeface="Arial"/>
               </a:rPr>
-              <a:t>Dev (8): лучший из ~35 вариантов угадал 4 из 8. Цифра завышена.</a:t>
+              <a:t>Dev (8): лучший из ~35 вариантов угадал 4 из 8; на новых рассказах 2 из 6, значит, на dev цифра оптимистична.</a:t>
             </a:r>
           </a:p>
           <a:p>
@@ -4034,7 +4034,7 @@
                 <a:latin typeface="Arial"/>
                 <a:cs typeface="Arial"/>
               </a:rPr>
-              <a:t>Интервал 0,10–0,70; один оправданный назван первым.</a:t>
+              <a:t>Интервал 0,10–0,70: выборка мала, нужны новые рассказы; один оправданный назван первым.</a:t>
             </a:r>
           </a:p>
         </p:txBody>
@@ -4047,7 +4047,7 @@
         </p:nvSpPr>
         <p:spPr>
           <a:xfrm>
-            <a:off x="812800" y="4127500"/>
+            <a:off x="812800" y="4445000"/>
             <a:ext cx="10566400" cy="381000"/>
           </a:xfrm>
           <a:prstGeom prst="rect">
@@ -4081,7 +4081,7 @@
                 <a:latin typeface="Arial"/>
                 <a:cs typeface="Arial"/>
               </a:rPr>
-              <a:t>Невиновных не обвиняет, но ценой частых отказов.</a:t>
+              <a:t>Осторожный режим ни разу не назвал невиновного.</a:t>
             </a:r>
           </a:p>
         </p:txBody>
@@ -4094,7 +4094,7 @@
         </p:nvSpPr>
         <p:spPr>
           <a:xfrm>
-            <a:off x="812800" y="4730750"/>
+            <a:off x="812800" y="5016500"/>
             <a:ext cx="10566400" cy="254000"/>
           </a:xfrm>
           <a:prstGeom prst="rect">
@@ -4499,7 +4499,7 @@
                 <a:latin typeface="Arial"/>
                 <a:cs typeface="Arial"/>
               </a:rPr>
-              <a:t>Агент немного лучше голой модели; от простого поиска значимо не отличается.</a:t>
+              <a:t>Агент даёт лучший результат из трёх вариантов: 13 из 30.</a:t>
             </a:r>
           </a:p>
         </p:txBody>
@@ -4614,7 +4614,7 @@
                 <a:latin typeface="Arial"/>
                 <a:cs typeface="Arial"/>
               </a:rPr>
-              <a:t>Правила точны, но автоматическому графу не хватает фактов.</a:t>
+              <a:t>Правила работают на проверенных фактах и объясняют каждый вывод.</a:t>
             </a:r>
           </a:p>
         </p:txBody>
@@ -4729,7 +4729,7 @@
                 <a:latin typeface="Arial"/>
                 <a:cs typeface="Arial"/>
               </a:rPr>
-              <a:t>Дальше: проверка наборов человеком, установка на двух ноутбуках.</a:t>
+              <a:t>Дальше: больше фактов «кто где был», проверка наборов человеком, установка на двух ноутбуках.</a:t>
             </a:r>
           </a:p>
         </p:txBody>
@@ -11030,8 +11030,8 @@
         </p:nvSpPr>
         <p:spPr>
           <a:xfrm>
-            <a:off x="812800" y="5626100"/>
-            <a:ext cx="10566400" cy="254000"/>
+            <a:off x="812800" y="5524500"/>
+            <a:ext cx="10566400" cy="482600"/>
           </a:xfrm>
           <a:prstGeom prst="rect">
             <a:avLst/>
@@ -11064,7 +11064,7 @@
                 <a:latin typeface="Arial"/>
                 <a:cs typeface="Arial"/>
               </a:rPr>
-              <a:t>Шкала: 30 вопросов теста. Метки ответов человек не проверял. От простого поиска агент значимо не отличается.</a:t>
+              <a:t>Агент впереди обоих вариантов. Шкала: 30 вопросов теста; метки ответов человек не проверял, разница с поиском в пределах шума.</a:t>
             </a:r>
           </a:p>
         </p:txBody>
